--- a/teslim/SUNUM.pptx
+++ b/teslim/SUNUM.pptx
@@ -17,6 +17,8 @@
     <p:sldId id="265" r:id="rId16"/>
     <p:sldId id="266" r:id="rId17"/>
     <p:sldId id="267" r:id="rId18"/>
+    <p:sldId id="271" r:id="rId22"/>
+    <p:sldId id="272" r:id="rId23"/>
     <p:sldId id="268" r:id="rId19"/>
     <p:sldId id="269" r:id="rId20"/>
     <p:sldId id="270" r:id="rId21"/>
@@ -5476,7 +5478,7 @@
                 </a:solidFill>
                 <a:latin typeface="Calibri"/>
               </a:rPr>
-              <a:t>SPARCS'ta F1 0.82. Ölçülen radyometrik kayma (~2 kat) sonucun bir kısmını açıklıyor.</a:t>
+              <a:t>SPARCS'ta F1 0.85. Radyometrik kayma ölçüldü ve elendi: düzeltme ROC-AUC'yi değiştirmiyor.</a:t>
             </a:r>
           </a:p>
         </p:txBody>
@@ -5525,6 +5527,1280 @@
 </file>
 
 <file path=ppt/slides/slide13.xml><?xml version="1.0" encoding="utf-8"?>
+<p:sld xmlns:a="http://schemas.openxmlformats.org/drawingml/2006/main" xmlns:p="http://schemas.openxmlformats.org/presentationml/2006/main" xmlns:r="http://schemas.openxmlformats.org/officeDocument/2006/relationships">
+  <p:cSld>
+    <p:spTree>
+      <p:nvGrpSpPr>
+        <p:cNvPr id="1" name=""/>
+        <p:cNvGrpSpPr/>
+        <p:nvPr/>
+      </p:nvGrpSpPr>
+      <p:grpSpPr/>
+      <p:sp>
+        <p:nvSpPr>
+          <p:cNvPr id="2" name="TextBox 1"/>
+          <p:cNvSpPr txBox="1"/>
+          <p:nvPr/>
+        </p:nvSpPr>
+        <p:spPr>
+          <a:xfrm>
+            <a:off x="548640" y="320040"/>
+            <a:ext cx="11064240" cy="274320"/>
+          </a:xfrm>
+          <a:prstGeom prst="rect">
+            <a:avLst/>
+          </a:prstGeom>
+          <a:noFill/>
+        </p:spPr>
+        <p:txBody>
+          <a:bodyPr wrap="square" lIns="0" rIns="0" tIns="0" bIns="0" anchor="t">
+            <a:spAutoFit/>
+          </a:bodyPr>
+          <a:lstStyle/>
+          <a:p>
+            <a:pPr algn="l"/>
+            <a:r>
+              <a:rPr sz="1100" b="1" i="0">
+                <a:solidFill>
+                  <a:srgbClr val="1C7293"/>
+                </a:solidFill>
+                <a:latin typeface="Calibri"/>
+              </a:rPr>
+              <a:t>HARİCİ DOĞRULAMA</a:t>
+            </a:r>
+          </a:p>
+        </p:txBody>
+      </p:sp>
+      <p:sp>
+        <p:nvSpPr>
+          <p:cNvPr id="3" name="TextBox 2"/>
+          <p:cNvSpPr txBox="1"/>
+          <p:nvPr/>
+        </p:nvSpPr>
+        <p:spPr>
+          <a:xfrm>
+            <a:off x="548640" y="621792"/>
+            <a:ext cx="11064240" cy="731520"/>
+          </a:xfrm>
+          <a:prstGeom prst="rect">
+            <a:avLst/>
+          </a:prstGeom>
+          <a:noFill/>
+        </p:spPr>
+        <p:txBody>
+          <a:bodyPr wrap="square" lIns="0" rIns="0" tIns="0" bIns="0" anchor="t">
+            <a:spAutoFit/>
+          </a:bodyPr>
+          <a:lstStyle/>
+          <a:p>
+            <a:pPr algn="l"/>
+            <a:r>
+              <a:rPr sz="3000" b="1" i="0">
+                <a:solidFill>
+                  <a:srgbClr val="0B2545"/>
+                </a:solidFill>
+                <a:latin typeface="Cambria"/>
+              </a:rPr>
+              <a:t>U-Net farklı sensörde daha dayanıklı</a:t>
+            </a:r>
+          </a:p>
+        </p:txBody>
+      </p:sp>
+      <p:sp>
+        <p:nvSpPr>
+          <p:cNvPr id="4" name="TextBox 3"/>
+          <p:cNvSpPr txBox="1"/>
+          <p:nvPr/>
+        </p:nvSpPr>
+        <p:spPr>
+          <a:xfrm>
+            <a:off x="548640" y="1691640"/>
+            <a:ext cx="11064240" cy="365760"/>
+          </a:xfrm>
+          <a:prstGeom prst="rect">
+            <a:avLst/>
+          </a:prstGeom>
+          <a:noFill/>
+        </p:spPr>
+        <p:txBody>
+          <a:bodyPr wrap="square" lIns="0" rIns="0" tIns="0" bIns="0" anchor="t">
+            <a:spAutoFit/>
+          </a:bodyPr>
+          <a:lstStyle/>
+          <a:p>
+            <a:pPr algn="l"/>
+            <a:r>
+              <a:rPr sz="1400" b="0" i="0">
+                <a:solidFill>
+                  <a:srgbClr val="5A6B7D"/>
+                </a:solidFill>
+                <a:latin typeface="Calibri"/>
+              </a:rPr>
+              <a:t>Aynı harici veri seti (SPARCS · Landsat-8), aynı ölçütler. U-Net maskesinden görüntü kararı üretilerek iki model karşılaştırıldı.</a:t>
+            </a:r>
+          </a:p>
+        </p:txBody>
+      </p:sp>
+      <p:graphicFrame>
+        <p:nvGraphicFramePr>
+          <p:cNvPr id="5" name="Table 4"/>
+          <p:cNvGraphicFramePr>
+            <a:graphicFrameLocks noGrp="1"/>
+          </p:cNvGraphicFramePr>
+          <p:nvPr/>
+        </p:nvGraphicFramePr>
+        <p:xfrm>
+          <a:off x="548640" y="2240280"/>
+          <a:ext cx="11064240" cy="2103120"/>
+        </p:xfrm>
+        <a:graphic>
+          <a:graphicData uri="http://schemas.openxmlformats.org/drawingml/2006/table">
+            <a:tbl>
+              <a:tblPr firstRow="1" bandRow="1">
+                <a:tableStyleId>{5C22544A-7EE6-4342-B048-85BDC9FD1C3A}</a:tableStyleId>
+              </a:tblPr>
+              <a:tblGrid>
+                <a:gridCol w="3931920"/>
+                <a:gridCol w="2377440"/>
+                <a:gridCol w="2377440"/>
+                <a:gridCol w="2377440"/>
+              </a:tblGrid>
+              <a:tr h="420624">
+                <a:tc>
+                  <a:txBody>
+                    <a:bodyPr/>
+                    <a:lstStyle/>
+                    <a:p>
+                      <a:r>
+                        <a:rPr sz="1250" b="1">
+                          <a:solidFill>
+                            <a:srgbClr val="FFFFFF"/>
+                          </a:solidFill>
+                          <a:latin typeface="Calibri"/>
+                        </a:rPr>
+                        <a:t>Ölçüt</a:t>
+                      </a:r>
+                    </a:p>
+                  </a:txBody>
+                  <a:tcPr anchor="ctr" marL="109728">
+                    <a:solidFill>
+                      <a:srgbClr val="0B2545"/>
+                    </a:solidFill>
+                  </a:tcPr>
+                </a:tc>
+                <a:tc>
+                  <a:txBody>
+                    <a:bodyPr/>
+                    <a:lstStyle/>
+                    <a:p>
+                      <a:r>
+                        <a:rPr sz="1250" b="1">
+                          <a:solidFill>
+                            <a:srgbClr val="FFFFFF"/>
+                          </a:solidFill>
+                          <a:latin typeface="Calibri"/>
+                        </a:rPr>
+                        <a:t>Sınıflandırıcı</a:t>
+                      </a:r>
+                    </a:p>
+                  </a:txBody>
+                  <a:tcPr anchor="ctr" marL="109728">
+                    <a:solidFill>
+                      <a:srgbClr val="0B2545"/>
+                    </a:solidFill>
+                  </a:tcPr>
+                </a:tc>
+                <a:tc>
+                  <a:txBody>
+                    <a:bodyPr/>
+                    <a:lstStyle/>
+                    <a:p>
+                      <a:r>
+                        <a:rPr sz="1250" b="1">
+                          <a:solidFill>
+                            <a:srgbClr val="FFFFFF"/>
+                          </a:solidFill>
+                          <a:latin typeface="Calibri"/>
+                        </a:rPr>
+                        <a:t>U-Net</a:t>
+                      </a:r>
+                    </a:p>
+                  </a:txBody>
+                  <a:tcPr anchor="ctr" marL="109728">
+                    <a:solidFill>
+                      <a:srgbClr val="0B2545"/>
+                    </a:solidFill>
+                  </a:tcPr>
+                </a:tc>
+                <a:tc>
+                  <a:txBody>
+                    <a:bodyPr/>
+                    <a:lstStyle/>
+                    <a:p>
+                      <a:r>
+                        <a:rPr sz="1250" b="1">
+                          <a:solidFill>
+                            <a:srgbClr val="FFFFFF"/>
+                          </a:solidFill>
+                          <a:latin typeface="Calibri"/>
+                        </a:rPr>
+                        <a:t>Fark</a:t>
+                      </a:r>
+                    </a:p>
+                  </a:txBody>
+                  <a:tcPr anchor="ctr" marL="109728">
+                    <a:solidFill>
+                      <a:srgbClr val="0B2545"/>
+                    </a:solidFill>
+                  </a:tcPr>
+                </a:tc>
+              </a:tr>
+              <a:tr h="420624">
+                <a:tc>
+                  <a:txBody>
+                    <a:bodyPr/>
+                    <a:lstStyle/>
+                    <a:p>
+                      <a:r>
+                        <a:rPr sz="1250" b="0">
+                          <a:solidFill>
+                            <a:srgbClr val="2C3E50"/>
+                          </a:solidFill>
+                          <a:latin typeface="Calibri"/>
+                        </a:rPr>
+                        <a:t>ROC-AUC</a:t>
+                      </a:r>
+                    </a:p>
+                  </a:txBody>
+                  <a:tcPr anchor="ctr" marL="109728">
+                    <a:solidFill>
+                      <a:srgbClr val="FFFFFF"/>
+                    </a:solidFill>
+                  </a:tcPr>
+                </a:tc>
+                <a:tc>
+                  <a:txBody>
+                    <a:bodyPr/>
+                    <a:lstStyle/>
+                    <a:p>
+                      <a:r>
+                        <a:rPr sz="1250" b="0">
+                          <a:solidFill>
+                            <a:srgbClr val="2C3E50"/>
+                          </a:solidFill>
+                          <a:latin typeface="Calibri"/>
+                        </a:rPr>
+                        <a:t>0.9645</a:t>
+                      </a:r>
+                    </a:p>
+                  </a:txBody>
+                  <a:tcPr anchor="ctr" marL="109728">
+                    <a:solidFill>
+                      <a:srgbClr val="FFFFFF"/>
+                    </a:solidFill>
+                  </a:tcPr>
+                </a:tc>
+                <a:tc>
+                  <a:txBody>
+                    <a:bodyPr/>
+                    <a:lstStyle/>
+                    <a:p>
+                      <a:r>
+                        <a:rPr sz="1250" b="0">
+                          <a:solidFill>
+                            <a:srgbClr val="2C3E50"/>
+                          </a:solidFill>
+                          <a:latin typeface="Calibri"/>
+                        </a:rPr>
+                        <a:t>0.9733</a:t>
+                      </a:r>
+                    </a:p>
+                  </a:txBody>
+                  <a:tcPr anchor="ctr" marL="109728">
+                    <a:solidFill>
+                      <a:srgbClr val="FFFFFF"/>
+                    </a:solidFill>
+                  </a:tcPr>
+                </a:tc>
+                <a:tc>
+                  <a:txBody>
+                    <a:bodyPr/>
+                    <a:lstStyle/>
+                    <a:p>
+                      <a:r>
+                        <a:rPr sz="1250" b="0">
+                          <a:solidFill>
+                            <a:srgbClr val="2C3E50"/>
+                          </a:solidFill>
+                          <a:latin typeface="Calibri"/>
+                        </a:rPr>
+                        <a:t>U-Net</a:t>
+                      </a:r>
+                    </a:p>
+                  </a:txBody>
+                  <a:tcPr anchor="ctr" marL="109728">
+                    <a:solidFill>
+                      <a:srgbClr val="FFFFFF"/>
+                    </a:solidFill>
+                  </a:tcPr>
+                </a:tc>
+              </a:tr>
+              <a:tr h="420624">
+                <a:tc>
+                  <a:txBody>
+                    <a:bodyPr/>
+                    <a:lstStyle/>
+                    <a:p>
+                      <a:r>
+                        <a:rPr sz="1250" b="0">
+                          <a:solidFill>
+                            <a:srgbClr val="2C3E50"/>
+                          </a:solidFill>
+                          <a:latin typeface="Calibri"/>
+                        </a:rPr>
+                        <a:t>F1</a:t>
+                      </a:r>
+                    </a:p>
+                  </a:txBody>
+                  <a:tcPr anchor="ctr" marL="109728">
+                    <a:solidFill>
+                      <a:srgbClr val="FFFFFF"/>
+                    </a:solidFill>
+                  </a:tcPr>
+                </a:tc>
+                <a:tc>
+                  <a:txBody>
+                    <a:bodyPr/>
+                    <a:lstStyle/>
+                    <a:p>
+                      <a:r>
+                        <a:rPr sz="1250" b="0">
+                          <a:solidFill>
+                            <a:srgbClr val="2C3E50"/>
+                          </a:solidFill>
+                          <a:latin typeface="Calibri"/>
+                        </a:rPr>
+                        <a:t>0.7438</a:t>
+                      </a:r>
+                    </a:p>
+                  </a:txBody>
+                  <a:tcPr anchor="ctr" marL="109728">
+                    <a:solidFill>
+                      <a:srgbClr val="FFFFFF"/>
+                    </a:solidFill>
+                  </a:tcPr>
+                </a:tc>
+                <a:tc>
+                  <a:txBody>
+                    <a:bodyPr/>
+                    <a:lstStyle/>
+                    <a:p>
+                      <a:r>
+                        <a:rPr sz="1250" b="0">
+                          <a:solidFill>
+                            <a:srgbClr val="2C3E50"/>
+                          </a:solidFill>
+                          <a:latin typeface="Calibri"/>
+                        </a:rPr>
+                        <a:t>0.8522</a:t>
+                      </a:r>
+                    </a:p>
+                  </a:txBody>
+                  <a:tcPr anchor="ctr" marL="109728">
+                    <a:solidFill>
+                      <a:srgbClr val="FFFFFF"/>
+                    </a:solidFill>
+                  </a:tcPr>
+                </a:tc>
+                <a:tc>
+                  <a:txBody>
+                    <a:bodyPr/>
+                    <a:lstStyle/>
+                    <a:p>
+                      <a:r>
+                        <a:rPr sz="1250" b="0">
+                          <a:solidFill>
+                            <a:srgbClr val="2C3E50"/>
+                          </a:solidFill>
+                          <a:latin typeface="Calibri"/>
+                        </a:rPr>
+                        <a:t>U-Net</a:t>
+                      </a:r>
+                    </a:p>
+                  </a:txBody>
+                  <a:tcPr anchor="ctr" marL="109728">
+                    <a:solidFill>
+                      <a:srgbClr val="FFFFFF"/>
+                    </a:solidFill>
+                  </a:tcPr>
+                </a:tc>
+              </a:tr>
+              <a:tr h="420624">
+                <a:tc>
+                  <a:txBody>
+                    <a:bodyPr/>
+                    <a:lstStyle/>
+                    <a:p>
+                      <a:r>
+                        <a:rPr sz="1250" b="0">
+                          <a:solidFill>
+                            <a:srgbClr val="2C3E50"/>
+                          </a:solidFill>
+                          <a:latin typeface="Calibri"/>
+                        </a:rPr>
+                        <a:t>Kaybedilen kullanılabilir veri</a:t>
+                      </a:r>
+                    </a:p>
+                  </a:txBody>
+                  <a:tcPr anchor="ctr" marL="109728">
+                    <a:solidFill>
+                      <a:srgbClr val="FFFFFF"/>
+                    </a:solidFill>
+                  </a:tcPr>
+                </a:tc>
+                <a:tc>
+                  <a:txBody>
+                    <a:bodyPr/>
+                    <a:lstStyle/>
+                    <a:p>
+                      <a:r>
+                        <a:rPr sz="1250" b="0">
+                          <a:solidFill>
+                            <a:srgbClr val="2C3E50"/>
+                          </a:solidFill>
+                          <a:latin typeface="Calibri"/>
+                        </a:rPr>
+                        <a:t>%19.98</a:t>
+                      </a:r>
+                    </a:p>
+                  </a:txBody>
+                  <a:tcPr anchor="ctr" marL="109728">
+                    <a:solidFill>
+                      <a:srgbClr val="FFFFFF"/>
+                    </a:solidFill>
+                  </a:tcPr>
+                </a:tc>
+                <a:tc>
+                  <a:txBody>
+                    <a:bodyPr/>
+                    <a:lstStyle/>
+                    <a:p>
+                      <a:r>
+                        <a:rPr sz="1250" b="0">
+                          <a:solidFill>
+                            <a:srgbClr val="2C3E50"/>
+                          </a:solidFill>
+                          <a:latin typeface="Calibri"/>
+                        </a:rPr>
+                        <a:t>%8.51</a:t>
+                      </a:r>
+                    </a:p>
+                  </a:txBody>
+                  <a:tcPr anchor="ctr" marL="109728">
+                    <a:solidFill>
+                      <a:srgbClr val="FFFFFF"/>
+                    </a:solidFill>
+                  </a:tcPr>
+                </a:tc>
+                <a:tc>
+                  <a:txBody>
+                    <a:bodyPr/>
+                    <a:lstStyle/>
+                    <a:p>
+                      <a:r>
+                        <a:rPr sz="1250" b="0">
+                          <a:solidFill>
+                            <a:srgbClr val="2C3E50"/>
+                          </a:solidFill>
+                          <a:latin typeface="Calibri"/>
+                        </a:rPr>
+                        <a:t>2.3× az</a:t>
+                      </a:r>
+                    </a:p>
+                  </a:txBody>
+                  <a:tcPr anchor="ctr" marL="109728">
+                    <a:solidFill>
+                      <a:srgbClr val="FFFFFF"/>
+                    </a:solidFill>
+                  </a:tcPr>
+                </a:tc>
+              </a:tr>
+              <a:tr h="420624">
+                <a:tc>
+                  <a:txBody>
+                    <a:bodyPr/>
+                    <a:lstStyle/>
+                    <a:p>
+                      <a:r>
+                        <a:rPr sz="1250" b="1">
+                          <a:solidFill>
+                            <a:srgbClr val="0B2545"/>
+                          </a:solidFill>
+                          <a:latin typeface="Calibri"/>
+                        </a:rPr>
+                        <a:t>Kar/buz yanlış eleme</a:t>
+                      </a:r>
+                    </a:p>
+                  </a:txBody>
+                  <a:tcPr anchor="ctr" marL="109728">
+                    <a:solidFill>
+                      <a:srgbClr val="E8F1F8"/>
+                    </a:solidFill>
+                  </a:tcPr>
+                </a:tc>
+                <a:tc>
+                  <a:txBody>
+                    <a:bodyPr/>
+                    <a:lstStyle/>
+                    <a:p>
+                      <a:r>
+                        <a:rPr sz="1250" b="1">
+                          <a:solidFill>
+                            <a:srgbClr val="0B2545"/>
+                          </a:solidFill>
+                          <a:latin typeface="Calibri"/>
+                        </a:rPr>
+                        <a:t>%58.62</a:t>
+                      </a:r>
+                    </a:p>
+                  </a:txBody>
+                  <a:tcPr anchor="ctr" marL="109728">
+                    <a:solidFill>
+                      <a:srgbClr val="E8F1F8"/>
+                    </a:solidFill>
+                  </a:tcPr>
+                </a:tc>
+                <a:tc>
+                  <a:txBody>
+                    <a:bodyPr/>
+                    <a:lstStyle/>
+                    <a:p>
+                      <a:r>
+                        <a:rPr sz="1250" b="1">
+                          <a:solidFill>
+                            <a:srgbClr val="0B2545"/>
+                          </a:solidFill>
+                          <a:latin typeface="Calibri"/>
+                        </a:rPr>
+                        <a:t>%5.07</a:t>
+                      </a:r>
+                    </a:p>
+                  </a:txBody>
+                  <a:tcPr anchor="ctr" marL="109728">
+                    <a:solidFill>
+                      <a:srgbClr val="E8F1F8"/>
+                    </a:solidFill>
+                  </a:tcPr>
+                </a:tc>
+                <a:tc>
+                  <a:txBody>
+                    <a:bodyPr/>
+                    <a:lstStyle/>
+                    <a:p>
+                      <a:r>
+                        <a:rPr sz="1250" b="1">
+                          <a:solidFill>
+                            <a:srgbClr val="0B2545"/>
+                          </a:solidFill>
+                          <a:latin typeface="Calibri"/>
+                        </a:rPr>
+                        <a:t>11.6× az</a:t>
+                      </a:r>
+                    </a:p>
+                  </a:txBody>
+                  <a:tcPr anchor="ctr" marL="109728">
+                    <a:solidFill>
+                      <a:srgbClr val="E8F1F8"/>
+                    </a:solidFill>
+                  </a:tcPr>
+                </a:tc>
+              </a:tr>
+            </a:tbl>
+          </a:graphicData>
+        </a:graphic>
+      </p:graphicFrame>
+      <p:sp>
+        <p:nvSpPr>
+          <p:cNvPr id="6" name="Rounded Rectangle 5"/>
+          <p:cNvSpPr/>
+          <p:nvPr/>
+        </p:nvSpPr>
+        <p:spPr>
+          <a:xfrm>
+            <a:off x="548640" y="4663440"/>
+            <a:ext cx="11064240" cy="1188720"/>
+          </a:xfrm>
+          <a:prstGeom prst="roundRect">
+            <a:avLst>
+              <a:gd name="adj" fmla="val 4000"/>
+            </a:avLst>
+          </a:prstGeom>
+          <a:solidFill>
+            <a:srgbClr val="F4F7FB"/>
+          </a:solidFill>
+          <a:ln w="12700">
+            <a:solidFill>
+              <a:srgbClr val="E2E9F2"/>
+            </a:solidFill>
+          </a:ln>
+          <a:effectLst/>
+        </p:spPr>
+        <p:style>
+          <a:lnRef idx="1">
+            <a:schemeClr val="accent1"/>
+          </a:lnRef>
+          <a:fillRef idx="3">
+            <a:schemeClr val="accent1"/>
+          </a:fillRef>
+          <a:effectRef idx="2">
+            <a:schemeClr val="accent1"/>
+          </a:effectRef>
+          <a:fontRef idx="minor">
+            <a:schemeClr val="lt1"/>
+          </a:fontRef>
+        </p:style>
+        <p:txBody>
+          <a:bodyPr rtlCol="0" anchor="ctr"/>
+          <a:lstStyle/>
+          <a:p/>
+        </p:txBody>
+      </p:sp>
+      <p:sp>
+        <p:nvSpPr>
+          <p:cNvPr id="7" name="TextBox 6"/>
+          <p:cNvSpPr txBox="1"/>
+          <p:nvPr/>
+        </p:nvSpPr>
+        <p:spPr>
+          <a:xfrm>
+            <a:off x="868680" y="4937760"/>
+            <a:ext cx="10424160" cy="731520"/>
+          </a:xfrm>
+          <a:prstGeom prst="rect">
+            <a:avLst/>
+          </a:prstGeom>
+          <a:noFill/>
+        </p:spPr>
+        <p:txBody>
+          <a:bodyPr wrap="square" lIns="0" rIns="0" tIns="0" bIns="0" anchor="t">
+            <a:spAutoFit/>
+          </a:bodyPr>
+          <a:lstStyle/>
+          <a:p>
+            <a:pPr algn="l"/>
+            <a:r>
+              <a:rPr sz="1400" b="0" i="0">
+                <a:solidFill>
+                  <a:srgbClr val="0B2545"/>
+                </a:solidFill>
+                <a:latin typeface="Calibri"/>
+              </a:rPr>
+              <a:t>Fark karelemeden değil görev türünden geliyor: aynı 64×64 ızgarada eğitilen sınıflandırıcı kar/buzda %64.37 veriyor — 256×256'dan da kötü.</a:t>
+            </a:r>
+          </a:p>
+        </p:txBody>
+      </p:sp>
+    </p:spTree>
+  </p:cSld>
+  <p:clrMapOvr>
+    <a:masterClrMapping/>
+  </p:clrMapOvr>
+</p:sld>
+</file>
+
+<file path=ppt/slides/slide14.xml><?xml version="1.0" encoding="utf-8"?>
+<p:sld xmlns:a="http://schemas.openxmlformats.org/drawingml/2006/main" xmlns:p="http://schemas.openxmlformats.org/presentationml/2006/main" xmlns:r="http://schemas.openxmlformats.org/officeDocument/2006/relationships">
+  <p:cSld>
+    <p:spTree>
+      <p:nvGrpSpPr>
+        <p:cNvPr id="1" name=""/>
+        <p:cNvGrpSpPr/>
+        <p:nvPr/>
+      </p:nvGrpSpPr>
+      <p:grpSpPr/>
+      <p:sp>
+        <p:nvSpPr>
+          <p:cNvPr id="2" name="TextBox 1"/>
+          <p:cNvSpPr txBox="1"/>
+          <p:nvPr/>
+        </p:nvSpPr>
+        <p:spPr>
+          <a:xfrm>
+            <a:off x="548640" y="320040"/>
+            <a:ext cx="11064240" cy="274320"/>
+          </a:xfrm>
+          <a:prstGeom prst="rect">
+            <a:avLst/>
+          </a:prstGeom>
+          <a:noFill/>
+        </p:spPr>
+        <p:txBody>
+          <a:bodyPr wrap="square" lIns="0" rIns="0" tIns="0" bIns="0" anchor="t">
+            <a:spAutoFit/>
+          </a:bodyPr>
+          <a:lstStyle/>
+          <a:p>
+            <a:pPr algn="l"/>
+            <a:r>
+              <a:rPr sz="1100" b="1" i="0">
+                <a:solidFill>
+                  <a:srgbClr val="1C7293"/>
+                </a:solidFill>
+                <a:latin typeface="Calibri"/>
+              </a:rPr>
+              <a:t>ÖLÇÜLEN NEGATİF SONUÇLAR</a:t>
+            </a:r>
+          </a:p>
+        </p:txBody>
+      </p:sp>
+      <p:sp>
+        <p:nvSpPr>
+          <p:cNvPr id="3" name="TextBox 2"/>
+          <p:cNvSpPr txBox="1"/>
+          <p:nvPr/>
+        </p:nvSpPr>
+        <p:spPr>
+          <a:xfrm>
+            <a:off x="548640" y="621792"/>
+            <a:ext cx="11064240" cy="731520"/>
+          </a:xfrm>
+          <a:prstGeom prst="rect">
+            <a:avLst/>
+          </a:prstGeom>
+          <a:noFill/>
+        </p:spPr>
+        <p:txBody>
+          <a:bodyPr wrap="square" lIns="0" rIns="0" tIns="0" bIns="0" anchor="t">
+            <a:spAutoFit/>
+          </a:bodyPr>
+          <a:lstStyle/>
+          <a:p>
+            <a:pPr algn="l"/>
+            <a:r>
+              <a:rPr sz="3000" b="1" i="0">
+                <a:solidFill>
+                  <a:srgbClr val="0B2545"/>
+                </a:solidFill>
+                <a:latin typeface="Cambria"/>
+              </a:rPr>
+              <a:t>İki varsayım sınandı, ikisi de çürüdü</a:t>
+            </a:r>
+          </a:p>
+        </p:txBody>
+      </p:sp>
+      <p:sp>
+        <p:nvSpPr>
+          <p:cNvPr id="4" name="TextBox 3"/>
+          <p:cNvSpPr txBox="1"/>
+          <p:nvPr/>
+        </p:nvSpPr>
+        <p:spPr>
+          <a:xfrm>
+            <a:off x="548640" y="1691640"/>
+            <a:ext cx="11064240" cy="365760"/>
+          </a:xfrm>
+          <a:prstGeom prst="rect">
+            <a:avLst/>
+          </a:prstGeom>
+          <a:noFill/>
+        </p:spPr>
+        <p:txBody>
+          <a:bodyPr wrap="square" lIns="0" rIns="0" tIns="0" bIns="0" anchor="t">
+            <a:spAutoFit/>
+          </a:bodyPr>
+          <a:lstStyle/>
+          <a:p>
+            <a:pPr algn="l"/>
+            <a:r>
+              <a:rPr sz="1400" b="0" i="0">
+                <a:solidFill>
+                  <a:srgbClr val="5A6B7D"/>
+                </a:solidFill>
+                <a:latin typeface="Calibri"/>
+              </a:rPr>
+              <a:t>Rapordaki iki açıklama ölçülerek elendi. Elenen hipotezler, doğrulananlar kadar bilgilendiricidir.</a:t>
+            </a:r>
+          </a:p>
+        </p:txBody>
+      </p:sp>
+      <p:graphicFrame>
+        <p:nvGraphicFramePr>
+          <p:cNvPr id="5" name="Table 4"/>
+          <p:cNvGraphicFramePr>
+            <a:graphicFrameLocks noGrp="1"/>
+          </p:cNvGraphicFramePr>
+          <p:nvPr/>
+        </p:nvGraphicFramePr>
+        <p:xfrm>
+          <a:off x="548640" y="2240280"/>
+          <a:ext cx="11064240" cy="2103120"/>
+        </p:xfrm>
+        <a:graphic>
+          <a:graphicData uri="http://schemas.openxmlformats.org/drawingml/2006/table">
+            <a:tbl>
+              <a:tblPr firstRow="1" bandRow="1">
+                <a:tableStyleId>{5C22544A-7EE6-4342-B048-85BDC9FD1C3A}</a:tableStyleId>
+              </a:tblPr>
+              <a:tblGrid>
+                <a:gridCol w="3931920"/>
+                <a:gridCol w="2377440"/>
+                <a:gridCol w="2377440"/>
+                <a:gridCol w="2377440"/>
+              </a:tblGrid>
+              <a:tr h="420624">
+                <a:tc>
+                  <a:txBody>
+                    <a:bodyPr/>
+                    <a:lstStyle/>
+                    <a:p>
+                      <a:r>
+                        <a:rPr sz="1250" b="1">
+                          <a:solidFill>
+                            <a:srgbClr val="FFFFFF"/>
+                          </a:solidFill>
+                          <a:latin typeface="Calibri"/>
+                        </a:rPr>
+                        <a:t>Varsayım</a:t>
+                      </a:r>
+                    </a:p>
+                  </a:txBody>
+                  <a:tcPr anchor="ctr" marL="109728">
+                    <a:solidFill>
+                      <a:srgbClr val="0B2545"/>
+                    </a:solidFill>
+                  </a:tcPr>
+                </a:tc>
+                <a:tc>
+                  <a:txBody>
+                    <a:bodyPr/>
+                    <a:lstStyle/>
+                    <a:p>
+                      <a:r>
+                        <a:rPr sz="1250" b="1">
+                          <a:solidFill>
+                            <a:srgbClr val="FFFFFF"/>
+                          </a:solidFill>
+                          <a:latin typeface="Calibri"/>
+                        </a:rPr>
+                        <a:t>Beklenen</a:t>
+                      </a:r>
+                    </a:p>
+                  </a:txBody>
+                  <a:tcPr anchor="ctr" marL="109728">
+                    <a:solidFill>
+                      <a:srgbClr val="0B2545"/>
+                    </a:solidFill>
+                  </a:tcPr>
+                </a:tc>
+                <a:tc>
+                  <a:txBody>
+                    <a:bodyPr/>
+                    <a:lstStyle/>
+                    <a:p>
+                      <a:r>
+                        <a:rPr sz="1250" b="1">
+                          <a:solidFill>
+                            <a:srgbClr val="FFFFFF"/>
+                          </a:solidFill>
+                          <a:latin typeface="Calibri"/>
+                        </a:rPr>
+                        <a:t>Ölçülen</a:t>
+                      </a:r>
+                    </a:p>
+                  </a:txBody>
+                  <a:tcPr anchor="ctr" marL="109728">
+                    <a:solidFill>
+                      <a:srgbClr val="0B2545"/>
+                    </a:solidFill>
+                  </a:tcPr>
+                </a:tc>
+                <a:tc>
+                  <a:txBody>
+                    <a:bodyPr/>
+                    <a:lstStyle/>
+                    <a:p>
+                      <a:r>
+                        <a:rPr sz="1250" b="1">
+                          <a:solidFill>
+                            <a:srgbClr val="FFFFFF"/>
+                          </a:solidFill>
+                          <a:latin typeface="Calibri"/>
+                        </a:rPr>
+                        <a:t>Sonuç</a:t>
+                      </a:r>
+                    </a:p>
+                  </a:txBody>
+                  <a:tcPr anchor="ctr" marL="109728">
+                    <a:solidFill>
+                      <a:srgbClr val="0B2545"/>
+                    </a:solidFill>
+                  </a:tcPr>
+                </a:tc>
+              </a:tr>
+              <a:tr h="420624">
+                <a:tc>
+                  <a:txBody>
+                    <a:bodyPr/>
+                    <a:lstStyle/>
+                    <a:p>
+                      <a:r>
+                        <a:rPr sz="1250" b="0">
+                          <a:solidFill>
+                            <a:srgbClr val="2C3E50"/>
+                          </a:solidFill>
+                          <a:latin typeface="Calibri"/>
+                        </a:rPr>
+                        <a:t>Güneş yüksekliği düzeltmesi SPARCS açığını açıklar</a:t>
+                      </a:r>
+                    </a:p>
+                  </a:txBody>
+                  <a:tcPr anchor="ctr" marL="109728">
+                    <a:solidFill>
+                      <a:srgbClr val="FFFFFF"/>
+                    </a:solidFill>
+                  </a:tcPr>
+                </a:tc>
+                <a:tc>
+                  <a:txBody>
+                    <a:bodyPr/>
+                    <a:lstStyle/>
+                    <a:p>
+                      <a:r>
+                        <a:rPr sz="1250" b="0">
+                          <a:solidFill>
+                            <a:srgbClr val="2C3E50"/>
+                          </a:solidFill>
+                          <a:latin typeface="Calibri"/>
+                        </a:rPr>
+                        <a:t>ROC-AUC yükselir</a:t>
+                      </a:r>
+                    </a:p>
+                  </a:txBody>
+                  <a:tcPr anchor="ctr" marL="109728">
+                    <a:solidFill>
+                      <a:srgbClr val="FFFFFF"/>
+                    </a:solidFill>
+                  </a:tcPr>
+                </a:tc>
+                <a:tc>
+                  <a:txBody>
+                    <a:bodyPr/>
+                    <a:lstStyle/>
+                    <a:p>
+                      <a:r>
+                        <a:rPr sz="1250" b="0">
+                          <a:solidFill>
+                            <a:srgbClr val="2C3E50"/>
+                          </a:solidFill>
+                          <a:latin typeface="Calibri"/>
+                        </a:rPr>
+                        <a:t>0.9733 → 0.9732</a:t>
+                      </a:r>
+                    </a:p>
+                  </a:txBody>
+                  <a:tcPr anchor="ctr" marL="109728">
+                    <a:solidFill>
+                      <a:srgbClr val="FFFFFF"/>
+                    </a:solidFill>
+                  </a:tcPr>
+                </a:tc>
+                <a:tc>
+                  <a:txBody>
+                    <a:bodyPr/>
+                    <a:lstStyle/>
+                    <a:p>
+                      <a:r>
+                        <a:rPr sz="1250" b="0">
+                          <a:solidFill>
+                            <a:srgbClr val="2C3E50"/>
+                          </a:solidFill>
+                          <a:latin typeface="Calibri"/>
+                        </a:rPr>
+                        <a:t>Çürüdü</a:t>
+                      </a:r>
+                    </a:p>
+                  </a:txBody>
+                  <a:tcPr anchor="ctr" marL="109728">
+                    <a:solidFill>
+                      <a:srgbClr val="FFFFFF"/>
+                    </a:solidFill>
+                  </a:tcPr>
+                </a:tc>
+              </a:tr>
+              <a:tr h="420624">
+                <a:tc>
+                  <a:txBody>
+                    <a:bodyPr/>
+                    <a:lstStyle/>
+                    <a:p>
+                      <a:r>
+                        <a:rPr sz="1250" b="0">
+                          <a:solidFill>
+                            <a:srgbClr val="2C3E50"/>
+                          </a:solidFill>
+                          <a:latin typeface="Calibri"/>
+                        </a:rPr>
+                        <a:t>Kısmi indirme yapısal kaybı kurtarır</a:t>
+                      </a:r>
+                    </a:p>
+                  </a:txBody>
+                  <a:tcPr anchor="ctr" marL="109728">
+                    <a:solidFill>
+                      <a:srgbClr val="FFFFFF"/>
+                    </a:solidFill>
+                  </a:tcPr>
+                </a:tc>
+                <a:tc>
+                  <a:txBody>
+                    <a:bodyPr/>
+                    <a:lstStyle/>
+                    <a:p>
+                      <a:r>
+                        <a:rPr sz="1250" b="0">
+                          <a:solidFill>
+                            <a:srgbClr val="2C3E50"/>
+                          </a:solidFill>
+                          <a:latin typeface="Calibri"/>
+                        </a:rPr>
+                        <a:t>Kayıp büyük ölçüde geri alınır</a:t>
+                      </a:r>
+                    </a:p>
+                  </a:txBody>
+                  <a:tcPr anchor="ctr" marL="109728">
+                    <a:solidFill>
+                      <a:srgbClr val="FFFFFF"/>
+                    </a:solidFill>
+                  </a:tcPr>
+                </a:tc>
+                <a:tc>
+                  <a:txBody>
+                    <a:bodyPr/>
+                    <a:lstStyle/>
+                    <a:p>
+                      <a:r>
+                        <a:rPr sz="1250" b="0">
+                          <a:solidFill>
+                            <a:srgbClr val="2C3E50"/>
+                          </a:solidFill>
+                          <a:latin typeface="Calibri"/>
+                        </a:rPr>
+                        <a:t>%8.13 → %4.00, kazanç −13.5 puan</a:t>
+                      </a:r>
+                    </a:p>
+                  </a:txBody>
+                  <a:tcPr anchor="ctr" marL="109728">
+                    <a:solidFill>
+                      <a:srgbClr val="FFFFFF"/>
+                    </a:solidFill>
+                  </a:tcPr>
+                </a:tc>
+                <a:tc>
+                  <a:txBody>
+                    <a:bodyPr/>
+                    <a:lstStyle/>
+                    <a:p>
+                      <a:r>
+                        <a:rPr sz="1250" b="0">
+                          <a:solidFill>
+                            <a:srgbClr val="2C3E50"/>
+                          </a:solidFill>
+                          <a:latin typeface="Calibri"/>
+                        </a:rPr>
+                        <a:t>Elverişsiz</a:t>
+                      </a:r>
+                    </a:p>
+                  </a:txBody>
+                  <a:tcPr anchor="ctr" marL="109728">
+                    <a:solidFill>
+                      <a:srgbClr val="FFFFFF"/>
+                    </a:solidFill>
+                  </a:tcPr>
+                </a:tc>
+              </a:tr>
+              <a:tr h="420624">
+                <a:tc>
+                  <a:txBody>
+                    <a:bodyPr/>
+                    <a:lstStyle/>
+                    <a:p>
+                      <a:r>
+                        <a:rPr sz="1250" b="0">
+                          <a:solidFill>
+                            <a:srgbClr val="2C3E50"/>
+                          </a:solidFill>
+                          <a:latin typeface="Calibri"/>
+                        </a:rPr>
+                        <a:t>mobilenetv2_050 daha iyi bir ödünleşim sunar</a:t>
+                      </a:r>
+                    </a:p>
+                  </a:txBody>
+                  <a:tcPr anchor="ctr" marL="109728">
+                    <a:solidFill>
+                      <a:srgbClr val="FFFFFF"/>
+                    </a:solidFill>
+                  </a:tcPr>
+                </a:tc>
+                <a:tc>
+                  <a:txBody>
+                    <a:bodyPr/>
+                    <a:lstStyle/>
+                    <a:p>
+                      <a:r>
+                        <a:rPr sz="1250" b="0">
+                          <a:solidFill>
+                            <a:srgbClr val="2C3E50"/>
+                          </a:solidFill>
+                          <a:latin typeface="Calibri"/>
+                        </a:rPr>
+                        <a:t>Disk 2.6× küçük</a:t>
+                      </a:r>
+                    </a:p>
+                  </a:txBody>
+                  <a:tcPr anchor="ctr" marL="109728">
+                    <a:solidFill>
+                      <a:srgbClr val="FFFFFF"/>
+                    </a:solidFill>
+                  </a:tcPr>
+                </a:tc>
+                <a:tc>
+                  <a:txBody>
+                    <a:bodyPr/>
+                    <a:lstStyle/>
+                    <a:p>
+                      <a:r>
+                        <a:rPr sz="1250" b="0">
+                          <a:solidFill>
+                            <a:srgbClr val="2C3E50"/>
+                          </a:solidFill>
+                          <a:latin typeface="Calibri"/>
+                        </a:rPr>
+                        <a:t>INT8 kaybı %3.56 → %13.54</a:t>
+                      </a:r>
+                    </a:p>
+                  </a:txBody>
+                  <a:tcPr anchor="ctr" marL="109728">
+                    <a:solidFill>
+                      <a:srgbClr val="FFFFFF"/>
+                    </a:solidFill>
+                  </a:tcPr>
+                </a:tc>
+                <a:tc>
+                  <a:txBody>
+                    <a:bodyPr/>
+                    <a:lstStyle/>
+                    <a:p>
+                      <a:r>
+                        <a:rPr sz="1250" b="0">
+                          <a:solidFill>
+                            <a:srgbClr val="2C3E50"/>
+                          </a:solidFill>
+                          <a:latin typeface="Calibri"/>
+                        </a:rPr>
+                        <a:t>Elendi</a:t>
+                      </a:r>
+                    </a:p>
+                  </a:txBody>
+                  <a:tcPr anchor="ctr" marL="109728">
+                    <a:solidFill>
+                      <a:srgbClr val="FFFFFF"/>
+                    </a:solidFill>
+                  </a:tcPr>
+                </a:tc>
+              </a:tr>
+            </a:tbl>
+          </a:graphicData>
+        </a:graphic>
+      </p:graphicFrame>
+      <p:sp>
+        <p:nvSpPr>
+          <p:cNvPr id="6" name="Rounded Rectangle 5"/>
+          <p:cNvSpPr/>
+          <p:nvPr/>
+        </p:nvSpPr>
+        <p:spPr>
+          <a:xfrm>
+            <a:off x="548640" y="4663440"/>
+            <a:ext cx="11064240" cy="1188720"/>
+          </a:xfrm>
+          <a:prstGeom prst="roundRect">
+            <a:avLst>
+              <a:gd name="adj" fmla="val 4000"/>
+            </a:avLst>
+          </a:prstGeom>
+          <a:solidFill>
+            <a:srgbClr val="F4F7FB"/>
+          </a:solidFill>
+          <a:ln w="12700">
+            <a:solidFill>
+              <a:srgbClr val="E2E9F2"/>
+            </a:solidFill>
+          </a:ln>
+          <a:effectLst/>
+        </p:spPr>
+        <p:style>
+          <a:lnRef idx="1">
+            <a:schemeClr val="accent1"/>
+          </a:lnRef>
+          <a:fillRef idx="3">
+            <a:schemeClr val="accent1"/>
+          </a:fillRef>
+          <a:effectRef idx="2">
+            <a:schemeClr val="accent1"/>
+          </a:effectRef>
+          <a:fontRef idx="minor">
+            <a:schemeClr val="lt1"/>
+          </a:fontRef>
+        </p:style>
+        <p:txBody>
+          <a:bodyPr rtlCol="0" anchor="ctr"/>
+          <a:lstStyle/>
+          <a:p/>
+        </p:txBody>
+      </p:sp>
+      <p:sp>
+        <p:nvSpPr>
+          <p:cNvPr id="7" name="TextBox 6"/>
+          <p:cNvSpPr txBox="1"/>
+          <p:nvPr/>
+        </p:nvSpPr>
+        <p:spPr>
+          <a:xfrm>
+            <a:off x="868680" y="4937760"/>
+            <a:ext cx="10424160" cy="731520"/>
+          </a:xfrm>
+          <a:prstGeom prst="rect">
+            <a:avLst/>
+          </a:prstGeom>
+          <a:noFill/>
+        </p:spPr>
+        <p:txBody>
+          <a:bodyPr wrap="square" lIns="0" rIns="0" tIns="0" bIns="0" anchor="t">
+            <a:spAutoFit/>
+          </a:bodyPr>
+          <a:lstStyle/>
+          <a:p>
+            <a:pPr algn="l"/>
+            <a:r>
+              <a:rPr sz="1400" b="0" i="0">
+                <a:solidFill>
+                  <a:srgbClr val="0B2545"/>
+                </a:solidFill>
+                <a:latin typeface="Calibri"/>
+              </a:rPr>
+              <a:t>Kısmi indirmenin maliyeti metadata değil parçalanmadır: bloklar bağımsız sıkıştırıldığında yük %28 büyüyor.</a:t>
+            </a:r>
+          </a:p>
+        </p:txBody>
+      </p:sp>
+    </p:spTree>
+  </p:cSld>
+  <p:clrMapOvr>
+    <a:masterClrMapping/>
+  </p:clrMapOvr>
+</p:sld>
+</file>
+
+<file path=ppt/slides/slide15.xml><?xml version="1.0" encoding="utf-8"?>
 <p:sld xmlns:a="http://schemas.openxmlformats.org/drawingml/2006/main" xmlns:p="http://schemas.openxmlformats.org/presentationml/2006/main" xmlns:r="http://schemas.openxmlformats.org/officeDocument/2006/relationships">
   <p:cSld>
     <p:bg>
@@ -5956,7 +7232,7 @@
 </p:sld>
 </file>
 
-<file path=ppt/slides/slide14.xml><?xml version="1.0" encoding="utf-8"?>
+<file path=ppt/slides/slide16.xml><?xml version="1.0" encoding="utf-8"?>
 <p:sld xmlns:a="http://schemas.openxmlformats.org/drawingml/2006/main" xmlns:p="http://schemas.openxmlformats.org/presentationml/2006/main" xmlns:r="http://schemas.openxmlformats.org/officeDocument/2006/relationships">
   <p:cSld>
     <p:bg>
@@ -8001,7 +9277,7 @@
 </p:sld>
 </file>
 
-<file path=ppt/slides/slide15.xml><?xml version="1.0" encoding="utf-8"?>
+<file path=ppt/slides/slide17.xml><?xml version="1.0" encoding="utf-8"?>
 <p:sld xmlns:a="http://schemas.openxmlformats.org/drawingml/2006/main" xmlns:p="http://schemas.openxmlformats.org/presentationml/2006/main" xmlns:r="http://schemas.openxmlformats.org/officeDocument/2006/relationships">
   <p:cSld>
     <p:bg>
@@ -8698,7 +9974,7 @@
                 </a:solidFill>
                 <a:latin typeface="Calibri"/>
               </a:rPr>
-              <a:t>• Kısmi indirme: maskeyle görüntünün yalnızca temiz bölgelerini indirmek</a:t>
+              <a:t>• Kısmi indirme için bölge-ilgi kodlaması (blok tabanlı yöntem elendi)</a:t>
             </a:r>
           </a:p>
           <a:p>
@@ -12033,7 +13309,7 @@
                 </a:solidFill>
                 <a:latin typeface="Cambria"/>
               </a:rPr>
-              <a:t>0.9392</a:t>
+              <a:t>0.9366</a:t>
             </a:r>
           </a:p>
         </p:txBody>
@@ -12517,7 +13793,7 @@
                 </a:solidFill>
                 <a:latin typeface="Cambria"/>
               </a:rPr>
-              <a:t>2.05 puan</a:t>
+              <a:t>2.31 puan</a:t>
             </a:r>
           </a:p>
         </p:txBody>
